--- a/S1-CL3-Cloud-Infrastructure-Improvement/delivery/topic_03/Topic_03_Slides.pptx
+++ b/S1-CL3-Cloud-Infrastructure-Improvement/delivery/topic_03/Topic_03_Slides.pptx
@@ -1123,6 +1123,11 @@
               <a:t>Redundancy is applied tier by tier, to the goal — not painted across everything.</a:t>
             </a:r>
           </a:p>
+          <a:p>
+            <a:r>
+              <a:t>The diagram shows the database with a question mark deliberately. Do not resolve it for them.</a:t>
+            </a:r>
+          </a:p>
         </p:txBody>
       </p:sp>
       <p:sp>
@@ -1195,7 +1200,12 @@
           </a:p>
           <a:p>
             <a:r>
-              <a:t>The assessed skill is arguing the trade-off, not naming the feature. A rejection argued well outscores a feature added by reflex.</a:t>
+              <a:t>The assessed skill is arguing the trade-off, not naming the feature. A well-argued rejection outscores a feature added by reflex.</a:t>
+            </a:r>
+          </a:p>
+          <a:p>
+            <a:r>
+              <a:t>Press them on availability class: a public marketing site losing an hour overnight is not the same as a system with an externally fixed deadline. Different systems, different answers, same method.</a:t>
             </a:r>
           </a:p>
         </p:txBody>
@@ -1345,12 +1355,12 @@
           </a:p>
           <a:p>
             <a:r>
-              <a:t>The practice vehicle runs MySQL with no single-instance constraint — the data-tier call is theirs to make, potentially the opposite of Ledgerline's, by the same reasoning. That's the learning, not a mistake.</a:t>
-            </a:r>
-          </a:p>
-          <a:p>
-            <a:r>
-              <a:t>Watch for the copied verdict; the constraint differs by design.</a:t>
+              <a:t>The data-tier call is theirs to make and argue. Two students can reach opposite verdicts and both be right, if both are argued against the goal and the cost. That's the learning, not a mistake.</a:t>
+            </a:r>
+          </a:p>
+          <a:p>
+            <a:r>
+              <a:t>Watch for a verdict copied off the table rather than argued. The table is the shape of the argument, not its answer.</a:t>
             </a:r>
           </a:p>
         </p:txBody>
@@ -4642,7 +4652,7 @@
                 </a:solidFill>
                 <a:latin typeface="Roboto"/>
               </a:rPr>
-              <a:t>The centrepiece: rejecting an improvement</a:t>
+              <a:t>The centrepiece: spending the money where it buys the most</a:t>
             </a:r>
           </a:p>
         </p:txBody>
@@ -4725,7 +4735,7 @@
               </a:spcAft>
             </a:pPr>
             <a:r>
-              <a:rPr sz="2400" b="1" i="0">
+              <a:rPr sz="2200" b="1" i="0">
                 <a:solidFill>
                   <a:srgbClr val="EDAB0C"/>
                 </a:solidFill>
@@ -4734,13 +4744,13 @@
               <a:t>■  </a:t>
             </a:r>
             <a:r>
-              <a:rPr sz="2400" b="0" i="0">
+              <a:rPr sz="2200" b="0" i="0">
                 <a:solidFill>
                   <a:srgbClr val="2A2929"/>
                 </a:solidFill>
                 <a:latin typeface="Roboto"/>
               </a:rPr>
-              <a:t>The accounting product is vendor-certified single-instance only — a failover database is simply not available for it.</a:t>
+              <a:t>Every tier here is a single point of failure. You cannot fix them all — so which one first, and what do you leave?</a:t>
             </a:r>
           </a:p>
           <a:p>
@@ -4756,7 +4766,7 @@
               </a:spcAft>
             </a:pPr>
             <a:r>
-              <a:rPr sz="2400" b="1" i="0">
+              <a:rPr sz="2200" b="1" i="0">
                 <a:solidFill>
                   <a:srgbClr val="EDAB0C"/>
                 </a:solidFill>
@@ -4765,13 +4775,13 @@
               <a:t>■  </a:t>
             </a:r>
             <a:r>
-              <a:rPr sz="2400" b="0" i="0">
+              <a:rPr sz="2200" b="0" i="0">
                 <a:solidFill>
                   <a:srgbClr val="2A2929"/>
                 </a:solidFill>
                 <a:latin typeface="Roboto"/>
               </a:rPr>
-              <a:t>The only route to one is replacing the product: new licence, data migration, change management, migration risk.</a:t>
+              <a:t>The compute tier is the cheapest and largest win: one instance with no load balancer means any instance failure is a total outage.</a:t>
             </a:r>
           </a:p>
           <a:p>
@@ -4787,7 +4797,7 @@
               </a:spcAft>
             </a:pPr>
             <a:r>
-              <a:rPr sz="2400" b="1" i="0">
+              <a:rPr sz="2200" b="1" i="0">
                 <a:solidFill>
                   <a:srgbClr val="EDAB0C"/>
                 </a:solidFill>
@@ -4796,13 +4806,13 @@
               <a:t>■  </a:t>
             </a:r>
             <a:r>
-              <a:rPr sz="2400" b="0" i="0">
+              <a:rPr sz="2200" b="0" i="0">
                 <a:solidFill>
                   <a:srgbClr val="2A2929"/>
                 </a:solidFill>
                 <a:latin typeface="Roboto"/>
               </a:rPr>
-              <a:t>That cost is disproportionate to the reliability gained, so the design rejects it — single-instance database, covered by backup, restore and DR.</a:t>
+              <a:t>The database is the expensive one: a failover standby roughly doubles the database line, for a site whose content changes rarely and restores cleanly from backup.</a:t>
             </a:r>
           </a:p>
           <a:p>
@@ -4818,7 +4828,7 @@
               </a:spcAft>
             </a:pPr>
             <a:r>
-              <a:rPr sz="2400" b="1" i="0">
+              <a:rPr sz="2200" b="1" i="0">
                 <a:solidFill>
                   <a:srgbClr val="EDAB0C"/>
                 </a:solidFill>
@@ -4827,13 +4837,13 @@
               <a:t>■  </a:t>
             </a:r>
             <a:r>
-              <a:rPr sz="2400" b="0" i="0">
+              <a:rPr sz="2200" b="0" i="0">
                 <a:solidFill>
                   <a:srgbClr val="2A2929"/>
                 </a:solidFill>
                 <a:latin typeface="Roboto"/>
               </a:rPr>
-              <a:t>"Reliable database = failover database" is the reflex to resist; justify against the goal and the cost, not a checklist.</a:t>
+              <a:t>"Reliable means Multi-AZ everywhere" is the reflex to resist. Rank by benefit per dollar against the stated goal, and be able to defend what you left out.</a:t>
             </a:r>
           </a:p>
         </p:txBody>
@@ -5191,7 +5201,7 @@
                           </a:solidFill>
                           <a:latin typeface="Roboto"/>
                         </a:rPr>
-                        <a:t>Single-instance + backup/restore + cross-region DR</a:t>
+                        <a:t>Backup + tested restore</a:t>
                       </a:r>
                     </a:p>
                   </a:txBody>
@@ -5213,7 +5223,7 @@
                           </a:solidFill>
                           <a:latin typeface="Roboto"/>
                         </a:rPr>
-                        <a:t>recover from loss; DR onshore</a:t>
+                        <a:t>recovers from loss; recovery measured in hours</a:t>
                       </a:r>
                     </a:p>
                   </a:txBody>
@@ -5235,7 +5245,7 @@
                           </a:solidFill>
                           <a:latin typeface="Roboto"/>
                         </a:rPr>
-                        <a:t>low — no product change</a:t>
+                        <a:t>low — already largely in place</a:t>
                       </a:r>
                     </a:p>
                   </a:txBody>
@@ -5257,7 +5267,7 @@
                           </a:solidFill>
                           <a:latin typeface="Roboto"/>
                         </a:rPr>
-                        <a:t>CHOSEN</a:t>
+                        <a:t>defensible if the recovery target allows it</a:t>
                       </a:r>
                     </a:p>
                   </a:txBody>
@@ -5325,7 +5335,7 @@
                           </a:solidFill>
                           <a:latin typeface="Roboto"/>
                         </a:rPr>
-                        <a:t>not available — vendor single-instance only</a:t>
+                        <a:t>roughly doubles the database line, ongoing</a:t>
                       </a:r>
                     </a:p>
                   </a:txBody>
@@ -5347,7 +5357,7 @@
                           </a:solidFill>
                           <a:latin typeface="Roboto"/>
                         </a:rPr>
-                        <a:t>infeasible</a:t>
+                        <a:t>defensible if the recovery target does not</a:t>
                       </a:r>
                     </a:p>
                   </a:txBody>
@@ -5371,7 +5381,7 @@
                           </a:solidFill>
                           <a:latin typeface="Roboto"/>
                         </a:rPr>
-                        <a:t>Replace the accounting product</a:t>
+                        <a:t>Fix compute first, revisit the database after</a:t>
                       </a:r>
                     </a:p>
                   </a:txBody>
@@ -5393,7 +5403,7 @@
                           </a:solidFill>
                           <a:latin typeface="Roboto"/>
                         </a:rPr>
-                        <a:t>enables failover</a:t>
+                        <a:t>removes the largest exposure for the least money</a:t>
                       </a:r>
                     </a:p>
                   </a:txBody>
@@ -5415,7 +5425,7 @@
                           </a:solidFill>
                           <a:latin typeface="Roboto"/>
                         </a:rPr>
-                        <a:t>licence + migration + change management + risk</a:t>
+                        <a:t>sequencing risk if the database then fails</a:t>
                       </a:r>
                     </a:p>
                   </a:txBody>
@@ -5437,7 +5447,7 @@
                           </a:solidFill>
                           <a:latin typeface="Roboto"/>
                         </a:rPr>
-                        <a:t>disproportionate — rejected</a:t>
+                        <a:t>commonly the strongest argued position</a:t>
                       </a:r>
                     </a:p>
                   </a:txBody>
@@ -5481,7 +5491,7 @@
                 </a:solidFill>
                 <a:latin typeface="Roboto Light"/>
               </a:rPr>
-              <a:t>The chosen row must be argued, not just stated — the reasoning is the mark.</a:t>
+              <a:t>There is no CHOSEN row. The verdict is the student's and the reasoning is the mark — this table is the shape of the argument, not its answer.</a:t>
             </a:r>
           </a:p>
         </p:txBody>
@@ -13714,7 +13724,7 @@
                 </a:solidFill>
                 <a:latin typeface="Roboto"/>
               </a:rPr>
-              <a:t>The shape of the target: the application tier redundant across zones behind a load balancer; the database covered by backup and restore; a cross-region DR copy, onshore.</a:t>
+              <a:t>The shape of the target: a load balancer and a pool of instances across two zones; the database decision still open; a cross-region backup copy, onshore.</a:t>
             </a:r>
           </a:p>
           <a:p>
@@ -13745,7 +13755,7 @@
                 </a:solidFill>
                 <a:latin typeface="Roboto"/>
               </a:rPr>
-              <a:t>One tier is deliberately not made redundant — the next slide argues why.</a:t>
+              <a:t>The database tier is left unresolved on this slide on purpose — the next slide argues it.</a:t>
             </a:r>
           </a:p>
         </p:txBody>
